--- a/2°Seminario_Human-level control through deep reinforcement learning/TP558_Seminario_DQN_Mnih2015.pptx
+++ b/2°Seminario_Human-level control through deep reinforcement learning/TP558_Seminario_DQN_Mnih2015.pptx
@@ -2295,7 +2295,7 @@
           </a:prstGeom>
           <a:extLst>
             <a:ext uri="{C572A759-6A51-4108-AA02-DFA0A04FC94B}">
-              <ma14:wrappingTextBoxFlag xmlns:ma14="http://schemas.microsoft.com/office/mac/drawingml/2011/main" xmlns="" val="0"/>
+              <ma14:wrappingTextBoxFlag xmlns="" xmlns:ma14="http://schemas.microsoft.com/office/mac/drawingml/2011/main" val="0"/>
             </a:ext>
           </a:extLst>
         </p:spPr>
@@ -2373,7 +2373,7 @@
           </a:prstGeom>
           <a:extLst>
             <a:ext uri="{C572A759-6A51-4108-AA02-DFA0A04FC94B}">
-              <ma14:wrappingTextBoxFlag xmlns:ma14="http://schemas.microsoft.com/office/mac/drawingml/2011/main" xmlns="" val="0"/>
+              <ma14:wrappingTextBoxFlag xmlns="" xmlns:ma14="http://schemas.microsoft.com/office/mac/drawingml/2011/main" val="0"/>
             </a:ext>
           </a:extLst>
         </p:spPr>
@@ -3904,7 +3904,7 @@
           </a:prstGeom>
           <a:extLst>
             <a:ext uri="{C572A759-6A51-4108-AA02-DFA0A04FC94B}">
-              <ma14:wrappingTextBoxFlag xmlns:ma14="http://schemas.microsoft.com/office/mac/drawingml/2011/main" xmlns="" val="0"/>
+              <ma14:wrappingTextBoxFlag xmlns="" xmlns:ma14="http://schemas.microsoft.com/office/mac/drawingml/2011/main" val="0"/>
             </a:ext>
           </a:extLst>
         </p:spPr>
@@ -5280,7 +5280,7 @@
           </a:prstGeom>
           <a:extLst>
             <a:ext uri="{C572A759-6A51-4108-AA02-DFA0A04FC94B}">
-              <ma14:wrappingTextBoxFlag xmlns:ma14="http://schemas.microsoft.com/office/mac/drawingml/2011/main" xmlns="" val="0"/>
+              <ma14:wrappingTextBoxFlag xmlns="" xmlns:ma14="http://schemas.microsoft.com/office/mac/drawingml/2011/main" val="0"/>
             </a:ext>
           </a:extLst>
         </p:spPr>
@@ -5626,7 +5626,7 @@
           </a:prstGeom>
           <a:extLst>
             <a:ext uri="{C572A759-6A51-4108-AA02-DFA0A04FC94B}">
-              <ma14:wrappingTextBoxFlag xmlns:ma14="http://schemas.microsoft.com/office/mac/drawingml/2011/main" xmlns="" val="0"/>
+              <ma14:wrappingTextBoxFlag xmlns="" xmlns:ma14="http://schemas.microsoft.com/office/mac/drawingml/2011/main" val="0"/>
             </a:ext>
           </a:extLst>
         </p:spPr>
@@ -6111,7 +6111,7 @@
           </a:prstGeom>
           <a:extLst>
             <a:ext uri="{C572A759-6A51-4108-AA02-DFA0A04FC94B}">
-              <ma14:wrappingTextBoxFlag xmlns:ma14="http://schemas.microsoft.com/office/mac/drawingml/2011/main" xmlns="" val="0"/>
+              <ma14:wrappingTextBoxFlag xmlns="" xmlns:ma14="http://schemas.microsoft.com/office/mac/drawingml/2011/main" val="0"/>
             </a:ext>
           </a:extLst>
         </p:spPr>
@@ -6796,7 +6796,7 @@
           </a:prstGeom>
           <a:extLst>
             <a:ext uri="{C572A759-6A51-4108-AA02-DFA0A04FC94B}">
-              <ma14:wrappingTextBoxFlag xmlns:ma14="http://schemas.microsoft.com/office/mac/drawingml/2011/main" xmlns="" val="0"/>
+              <ma14:wrappingTextBoxFlag xmlns="" xmlns:ma14="http://schemas.microsoft.com/office/mac/drawingml/2011/main" val="0"/>
             </a:ext>
           </a:extLst>
         </p:spPr>
@@ -7203,7 +7203,7 @@
           </a:prstGeom>
           <a:extLst>
             <a:ext uri="{C572A759-6A51-4108-AA02-DFA0A04FC94B}">
-              <ma14:wrappingTextBoxFlag xmlns:ma14="http://schemas.microsoft.com/office/mac/drawingml/2011/main" xmlns="" val="0"/>
+              <ma14:wrappingTextBoxFlag xmlns="" xmlns:ma14="http://schemas.microsoft.com/office/mac/drawingml/2011/main" val="0"/>
             </a:ext>
           </a:extLst>
         </p:spPr>
@@ -7588,7 +7588,7 @@
           </a:prstGeom>
           <a:extLst>
             <a:ext uri="{C572A759-6A51-4108-AA02-DFA0A04FC94B}">
-              <ma14:wrappingTextBoxFlag xmlns:ma14="http://schemas.microsoft.com/office/mac/drawingml/2011/main" xmlns="" val="0"/>
+              <ma14:wrappingTextBoxFlag xmlns="" xmlns:ma14="http://schemas.microsoft.com/office/mac/drawingml/2011/main" val="0"/>
             </a:ext>
           </a:extLst>
         </p:spPr>
@@ -7706,45 +7706,6 @@
       </p:pic>
       <p:sp>
         <p:nvSpPr>
-          <p:cNvPr id="4" name="Text 1"/>
-          <p:cNvSpPr/>
-          <p:nvPr/>
-        </p:nvSpPr>
-        <p:spPr>
-          <a:xfrm>
-            <a:off x="868680" y="5687568"/>
-            <a:ext cx="4663440" cy="164592"/>
-          </a:xfrm>
-          <a:prstGeom prst="rect">
-            <a:avLst/>
-          </a:prstGeom>
-          <a:noFill/>
-          <a:ln/>
-        </p:spPr>
-        <p:txBody>
-          <a:bodyPr wrap="square" lIns="0" tIns="0" rIns="0" bIns="0" rtlCol="0" anchor="ctr"/>
-          <a:lstStyle/>
-          <a:p>
-            <a:pPr marL="0" indent="0" algn="l">
-              <a:buNone/>
-            </a:pPr>
-            <a:r>
-              <a:rPr lang="en-US" sz="850" i="1" dirty="0">
-                <a:solidFill>
-                  <a:srgbClr val="7A7A7A"/>
-                </a:solidFill>
-                <a:latin typeface="Calibri" pitchFamily="34" charset="0"/>
-                <a:ea typeface="Calibri" pitchFamily="34" charset="-122"/>
-                <a:cs typeface="Calibri" pitchFamily="34" charset="-120"/>
-              </a:rPr>
-              <a:t>Notebook incluído no pacote; dados da Extended Data Table 2.</a:t>
-            </a:r>
-            <a:endParaRPr lang="en-US" sz="850" dirty="0"/>
-          </a:p>
-        </p:txBody>
-      </p:sp>
-      <p:sp>
-        <p:nvSpPr>
           <p:cNvPr id="5" name="Text 2"/>
           <p:cNvSpPr/>
           <p:nvPr/>
@@ -7933,7 +7894,7 @@
           </a:prstGeom>
           <a:extLst>
             <a:ext uri="{C572A759-6A51-4108-AA02-DFA0A04FC94B}">
-              <ma14:wrappingTextBoxFlag xmlns:ma14="http://schemas.microsoft.com/office/mac/drawingml/2011/main" xmlns="" val="0"/>
+              <ma14:wrappingTextBoxFlag xmlns="" xmlns:ma14="http://schemas.microsoft.com/office/mac/drawingml/2011/main" val="0"/>
             </a:ext>
           </a:extLst>
         </p:spPr>
@@ -8255,7 +8216,7 @@
           </a:prstGeom>
           <a:extLst>
             <a:ext uri="{C572A759-6A51-4108-AA02-DFA0A04FC94B}">
-              <ma14:wrappingTextBoxFlag xmlns:ma14="http://schemas.microsoft.com/office/mac/drawingml/2011/main" xmlns="" val="0"/>
+              <ma14:wrappingTextBoxFlag xmlns="" xmlns:ma14="http://schemas.microsoft.com/office/mac/drawingml/2011/main" val="0"/>
             </a:ext>
           </a:extLst>
         </p:spPr>
@@ -9198,7 +9159,7 @@
           </a:prstGeom>
           <a:extLst>
             <a:ext uri="{C572A759-6A51-4108-AA02-DFA0A04FC94B}">
-              <ma14:wrappingTextBoxFlag xmlns:ma14="http://schemas.microsoft.com/office/mac/drawingml/2011/main" xmlns="" val="0"/>
+              <ma14:wrappingTextBoxFlag xmlns="" xmlns:ma14="http://schemas.microsoft.com/office/mac/drawingml/2011/main" val="0"/>
             </a:ext>
           </a:extLst>
         </p:spPr>
@@ -9701,7 +9662,7 @@
           </a:prstGeom>
           <a:extLst>
             <a:ext uri="{C572A759-6A51-4108-AA02-DFA0A04FC94B}">
-              <ma14:wrappingTextBoxFlag xmlns:ma14="http://schemas.microsoft.com/office/mac/drawingml/2011/main" xmlns="" val="0"/>
+              <ma14:wrappingTextBoxFlag xmlns="" xmlns:ma14="http://schemas.microsoft.com/office/mac/drawingml/2011/main" val="0"/>
             </a:ext>
           </a:extLst>
         </p:spPr>
@@ -10029,7 +9990,7 @@
           </a:prstGeom>
           <a:extLst>
             <a:ext uri="{C572A759-6A51-4108-AA02-DFA0A04FC94B}">
-              <ma14:wrappingTextBoxFlag xmlns:ma14="http://schemas.microsoft.com/office/mac/drawingml/2011/main" xmlns="" val="0"/>
+              <ma14:wrappingTextBoxFlag xmlns="" xmlns:ma14="http://schemas.microsoft.com/office/mac/drawingml/2011/main" val="0"/>
             </a:ext>
           </a:extLst>
         </p:spPr>
@@ -10141,7 +10102,7 @@
           </a:prstGeom>
           <a:extLst>
             <a:ext uri="{C572A759-6A51-4108-AA02-DFA0A04FC94B}">
-              <ma14:wrappingTextBoxFlag xmlns:ma14="http://schemas.microsoft.com/office/mac/drawingml/2011/main" xmlns="" val="0"/>
+              <ma14:wrappingTextBoxFlag xmlns="" xmlns:ma14="http://schemas.microsoft.com/office/mac/drawingml/2011/main" val="0"/>
             </a:ext>
           </a:extLst>
         </p:spPr>
@@ -10562,7 +10523,7 @@
           </a:prstGeom>
           <a:extLst>
             <a:ext uri="{C572A759-6A51-4108-AA02-DFA0A04FC94B}">
-              <ma14:wrappingTextBoxFlag xmlns:ma14="http://schemas.microsoft.com/office/mac/drawingml/2011/main" xmlns="" val="0"/>
+              <ma14:wrappingTextBoxFlag xmlns="" xmlns:ma14="http://schemas.microsoft.com/office/mac/drawingml/2011/main" val="0"/>
             </a:ext>
           </a:extLst>
         </p:spPr>
@@ -11172,7 +11133,7 @@
           </a:prstGeom>
           <a:extLst>
             <a:ext uri="{C572A759-6A51-4108-AA02-DFA0A04FC94B}">
-              <ma14:wrappingTextBoxFlag xmlns:ma14="http://schemas.microsoft.com/office/mac/drawingml/2011/main" xmlns="" val="0"/>
+              <ma14:wrappingTextBoxFlag xmlns="" xmlns:ma14="http://schemas.microsoft.com/office/mac/drawingml/2011/main" val="0"/>
             </a:ext>
           </a:extLst>
         </p:spPr>
@@ -11966,7 +11927,7 @@
           </a:prstGeom>
           <a:extLst>
             <a:ext uri="{C572A759-6A51-4108-AA02-DFA0A04FC94B}">
-              <ma14:wrappingTextBoxFlag xmlns:ma14="http://schemas.microsoft.com/office/mac/drawingml/2011/main" xmlns="" val="0"/>
+              <ma14:wrappingTextBoxFlag xmlns="" xmlns:ma14="http://schemas.microsoft.com/office/mac/drawingml/2011/main" val="0"/>
             </a:ext>
           </a:extLst>
         </p:spPr>
@@ -12426,7 +12387,7 @@
           </a:prstGeom>
           <a:extLst>
             <a:ext uri="{C572A759-6A51-4108-AA02-DFA0A04FC94B}">
-              <ma14:wrappingTextBoxFlag xmlns:ma14="http://schemas.microsoft.com/office/mac/drawingml/2011/main" xmlns="" val="0"/>
+              <ma14:wrappingTextBoxFlag xmlns="" xmlns:ma14="http://schemas.microsoft.com/office/mac/drawingml/2011/main" val="0"/>
             </a:ext>
           </a:extLst>
         </p:spPr>
@@ -12901,7 +12862,7 @@
           </a:prstGeom>
           <a:extLst>
             <a:ext uri="{C572A759-6A51-4108-AA02-DFA0A04FC94B}">
-              <ma14:wrappingTextBoxFlag xmlns:ma14="http://schemas.microsoft.com/office/mac/drawingml/2011/main" xmlns="" val="0"/>
+              <ma14:wrappingTextBoxFlag xmlns="" xmlns:ma14="http://schemas.microsoft.com/office/mac/drawingml/2011/main" val="0"/>
             </a:ext>
           </a:extLst>
         </p:spPr>
@@ -13424,7 +13385,7 @@
           </a:prstGeom>
           <a:extLst>
             <a:ext uri="{C572A759-6A51-4108-AA02-DFA0A04FC94B}">
-              <ma14:wrappingTextBoxFlag xmlns:ma14="http://schemas.microsoft.com/office/mac/drawingml/2011/main" xmlns="" val="0"/>
+              <ma14:wrappingTextBoxFlag xmlns="" xmlns:ma14="http://schemas.microsoft.com/office/mac/drawingml/2011/main" val="0"/>
             </a:ext>
           </a:extLst>
         </p:spPr>
@@ -14267,7 +14228,7 @@
           </a:prstGeom>
           <a:extLst>
             <a:ext uri="{C572A759-6A51-4108-AA02-DFA0A04FC94B}">
-              <ma14:wrappingTextBoxFlag xmlns:ma14="http://schemas.microsoft.com/office/mac/drawingml/2011/main" xmlns="" val="0"/>
+              <ma14:wrappingTextBoxFlag xmlns="" xmlns:ma14="http://schemas.microsoft.com/office/mac/drawingml/2011/main" val="0"/>
             </a:ext>
           </a:extLst>
         </p:spPr>
@@ -14808,7 +14769,7 @@
           </a:prstGeom>
           <a:extLst>
             <a:ext uri="{C572A759-6A51-4108-AA02-DFA0A04FC94B}">
-              <ma14:wrappingTextBoxFlag xmlns:ma14="http://schemas.microsoft.com/office/mac/drawingml/2011/main" xmlns="" val="0"/>
+              <ma14:wrappingTextBoxFlag xmlns="" xmlns:ma14="http://schemas.microsoft.com/office/mac/drawingml/2011/main" val="0"/>
             </a:ext>
           </a:extLst>
         </p:spPr>
